--- a/Projects/Module01-UnderstandingCodingAgents/Module01 - Understanding Coding Agents.pptx
+++ b/Projects/Module01-UnderstandingCodingAgents/Module01 - Understanding Coding Agents.pptx
@@ -7884,7 +7884,7 @@
                 <a:ea typeface="Calibri" pitchFamily="34" charset="-122"/>
                 <a:cs typeface="Calibri" pitchFamily="34" charset="-120"/>
               </a:rPr>
-              <a:t>No code runs in this Module, so there is no build or console output to verify — implementation starts in Module 2.</a:t>
+              <a:t>No code runs in this Module, so there is no build or console output to verify — implementation starts in Module 2a.</a:t>
             </a:r>
             <a:endParaRPr lang="en-US" sz="1250" dirty="0"/>
           </a:p>
